--- a/examples/practice/실습_과학_확산.pptx
+++ b/examples/practice/실습_과학_확산.pptx
@@ -582,7 +582,7 @@
           <a:lstStyle/>
           <a:p>
             <a:r>
-              <a:t>비커를 흔들거나 저으면 확산이 아니라 섞기가 된다. 3번에서 동시에 떨어뜨리는 것이 중요하다.</a:t>
+              <a:t>비커를 흔들거나 저으면 확산이 아니라 섞기가 된다. 3번에서는 두 비커에 동시에 떨어뜨리게 한다.</a:t>
             </a:r>
           </a:p>
         </p:txBody>
@@ -5022,7 +5022,7 @@
                 <a:ea typeface="맑은 고딕"/>
                 <a:cs typeface="맑은 고딕"/>
               </a:rPr>
-              <a:t>교실 앞 교탁에서 향수병 뚜껑을 열면, 잠시 뒤 맨 뒷자리 학생도 냄새를 맡을 수 있다.</a:t>
+              <a:t>교실 앞 교탁에서 향수병 뚜껑을 열면 잠시 뒤 맨 뒷자리 학생도 냄새를 맡을 수 있다.</a:t>
             </a:r>
           </a:p>
           <a:p>
@@ -5572,7 +5572,7 @@
                 <a:ea typeface="맑은 고딕"/>
                 <a:cs typeface="맑은 고딕"/>
               </a:rPr>
-              <a:t>잉크 입자와 물 입자가 모두 스스로 움직이므로, 시간이 지나면 잉크 입자가 물 전체에 고르게 퍼진다.</a:t>
+              <a:t>잉크 입자와 물 입자가 모두 스스로 움직이므로 시간이 지나면 잉크 입자가 물 전체에 고르게 퍼진다.</a:t>
             </a:r>
           </a:p>
         </p:txBody>
